--- a/p05/a-frame-defining-components.pptx
+++ b/p05/a-frame-defining-components.pptx
@@ -5,7 +5,7 @@
     <p:sldMasterId id="2147483660" r:id="rId1"/>
   </p:sldMasterIdLst>
   <p:notesMasterIdLst>
-    <p:notesMasterId r:id="rId15"/>
+    <p:notesMasterId r:id="rId16"/>
   </p:notesMasterIdLst>
   <p:sldIdLst>
     <p:sldId id="281" r:id="rId2"/>
@@ -20,7 +20,8 @@
     <p:sldId id="279" r:id="rId11"/>
     <p:sldId id="294" r:id="rId12"/>
     <p:sldId id="280" r:id="rId13"/>
-    <p:sldId id="293" r:id="rId14"/>
+    <p:sldId id="295" r:id="rId14"/>
+    <p:sldId id="293" r:id="rId15"/>
   </p:sldIdLst>
   <p:sldSz cx="12192000" cy="6858000"/>
   <p:notesSz cx="6858000" cy="9144000"/>
@@ -209,7 +210,7 @@
           <a:p>
             <a:fld id="{0CC22E7C-05FA-4B07-9A3E-26967016A603}" type="datetimeFigureOut">
               <a:rPr lang="en-US" smtClean="0"/>
-              <a:t>10/7/2026</a:t>
+              <a:t>10/8/2026</a:t>
             </a:fld>
             <a:endParaRPr lang="en-US"/>
           </a:p>
@@ -944,7 +945,7 @@
           <a:p>
             <a:fld id="{846CE7D5-CF57-46EF-B807-FDD0502418D4}" type="datetimeFigureOut">
               <a:rPr lang="en-US" smtClean="0"/>
-              <a:t>10/7/2026</a:t>
+              <a:t>10/8/2026</a:t>
             </a:fld>
             <a:endParaRPr lang="en-US"/>
           </a:p>
@@ -1114,7 +1115,7 @@
           <a:p>
             <a:fld id="{846CE7D5-CF57-46EF-B807-FDD0502418D4}" type="datetimeFigureOut">
               <a:rPr lang="en-US" smtClean="0"/>
-              <a:t>10/7/2026</a:t>
+              <a:t>10/8/2026</a:t>
             </a:fld>
             <a:endParaRPr lang="en-US"/>
           </a:p>
@@ -1294,7 +1295,7 @@
           <a:p>
             <a:fld id="{846CE7D5-CF57-46EF-B807-FDD0502418D4}" type="datetimeFigureOut">
               <a:rPr lang="en-US" smtClean="0"/>
-              <a:t>10/7/2026</a:t>
+              <a:t>10/8/2026</a:t>
             </a:fld>
             <a:endParaRPr lang="en-US"/>
           </a:p>
@@ -1464,7 +1465,7 @@
           <a:p>
             <a:fld id="{846CE7D5-CF57-46EF-B807-FDD0502418D4}" type="datetimeFigureOut">
               <a:rPr lang="en-US" smtClean="0"/>
-              <a:t>10/7/2026</a:t>
+              <a:t>10/8/2026</a:t>
             </a:fld>
             <a:endParaRPr lang="en-US"/>
           </a:p>
@@ -1710,7 +1711,7 @@
           <a:p>
             <a:fld id="{846CE7D5-CF57-46EF-B807-FDD0502418D4}" type="datetimeFigureOut">
               <a:rPr lang="en-US" smtClean="0"/>
-              <a:t>10/7/2026</a:t>
+              <a:t>10/8/2026</a:t>
             </a:fld>
             <a:endParaRPr lang="en-US"/>
           </a:p>
@@ -1942,7 +1943,7 @@
           <a:p>
             <a:fld id="{846CE7D5-CF57-46EF-B807-FDD0502418D4}" type="datetimeFigureOut">
               <a:rPr lang="en-US" smtClean="0"/>
-              <a:t>10/7/2026</a:t>
+              <a:t>10/8/2026</a:t>
             </a:fld>
             <a:endParaRPr lang="en-US"/>
           </a:p>
@@ -2309,7 +2310,7 @@
           <a:p>
             <a:fld id="{846CE7D5-CF57-46EF-B807-FDD0502418D4}" type="datetimeFigureOut">
               <a:rPr lang="en-US" smtClean="0"/>
-              <a:t>10/7/2026</a:t>
+              <a:t>10/8/2026</a:t>
             </a:fld>
             <a:endParaRPr lang="en-US"/>
           </a:p>
@@ -2427,7 +2428,7 @@
           <a:p>
             <a:fld id="{846CE7D5-CF57-46EF-B807-FDD0502418D4}" type="datetimeFigureOut">
               <a:rPr lang="en-US" smtClean="0"/>
-              <a:t>10/7/2026</a:t>
+              <a:t>10/8/2026</a:t>
             </a:fld>
             <a:endParaRPr lang="en-US"/>
           </a:p>
@@ -2522,7 +2523,7 @@
           <a:p>
             <a:fld id="{846CE7D5-CF57-46EF-B807-FDD0502418D4}" type="datetimeFigureOut">
               <a:rPr lang="en-US" smtClean="0"/>
-              <a:t>10/7/2026</a:t>
+              <a:t>10/8/2026</a:t>
             </a:fld>
             <a:endParaRPr lang="en-US"/>
           </a:p>
@@ -2799,7 +2800,7 @@
           <a:p>
             <a:fld id="{846CE7D5-CF57-46EF-B807-FDD0502418D4}" type="datetimeFigureOut">
               <a:rPr lang="en-US" smtClean="0"/>
-              <a:t>10/7/2026</a:t>
+              <a:t>10/8/2026</a:t>
             </a:fld>
             <a:endParaRPr lang="en-US"/>
           </a:p>
@@ -3056,7 +3057,7 @@
           <a:p>
             <a:fld id="{846CE7D5-CF57-46EF-B807-FDD0502418D4}" type="datetimeFigureOut">
               <a:rPr lang="en-US" smtClean="0"/>
-              <a:t>10/7/2026</a:t>
+              <a:t>10/8/2026</a:t>
             </a:fld>
             <a:endParaRPr lang="en-US"/>
           </a:p>
@@ -3269,7 +3270,7 @@
           <a:p>
             <a:fld id="{846CE7D5-CF57-46EF-B807-FDD0502418D4}" type="datetimeFigureOut">
               <a:rPr lang="en-US" smtClean="0"/>
-              <a:t>10/7/2026</a:t>
+              <a:t>10/8/2026</a:t>
             </a:fld>
             <a:endParaRPr lang="en-US"/>
           </a:p>
@@ -5618,6 +5619,139 @@
 </file>
 
 <file path=ppt/slides/slide13.xml><?xml version="1.0" encoding="utf-8"?>
+<p:sld xmlns:a="http://schemas.openxmlformats.org/drawingml/2006/main" xmlns:r="http://schemas.openxmlformats.org/officeDocument/2006/relationships" xmlns:p="http://schemas.openxmlformats.org/presentationml/2006/main">
+  <p:cSld>
+    <p:spTree>
+      <p:nvGrpSpPr>
+        <p:cNvPr id="1" name=""/>
+        <p:cNvGrpSpPr/>
+        <p:nvPr/>
+      </p:nvGrpSpPr>
+      <p:grpSpPr>
+        <a:xfrm>
+          <a:off x="0" y="0"/>
+          <a:ext cx="0" cy="0"/>
+          <a:chOff x="0" y="0"/>
+          <a:chExt cx="0" cy="0"/>
+        </a:xfrm>
+      </p:grpSpPr>
+      <p:sp>
+        <p:nvSpPr>
+          <p:cNvPr id="2" name="Title 1">
+            <a:extLst>
+              <a:ext uri="{FF2B5EF4-FFF2-40B4-BE49-F238E27FC236}">
+                <a16:creationId xmlns:a16="http://schemas.microsoft.com/office/drawing/2014/main" id="{649C2C3E-9BD3-CD05-0674-910C7280B3B1}"/>
+              </a:ext>
+            </a:extLst>
+          </p:cNvPr>
+          <p:cNvSpPr>
+            <a:spLocks noGrp="1"/>
+          </p:cNvSpPr>
+          <p:nvPr>
+            <p:ph type="title"/>
+          </p:nvPr>
+        </p:nvSpPr>
+        <p:spPr/>
+        <p:txBody>
+          <a:bodyPr/>
+          <a:lstStyle/>
+          <a:p>
+            <a:r>
+              <a:rPr lang="en-US" dirty="0"/>
+              <a:t>AI exercise</a:t>
+            </a:r>
+          </a:p>
+        </p:txBody>
+      </p:sp>
+      <p:sp>
+        <p:nvSpPr>
+          <p:cNvPr id="3" name="Content Placeholder 2">
+            <a:extLst>
+              <a:ext uri="{FF2B5EF4-FFF2-40B4-BE49-F238E27FC236}">
+                <a16:creationId xmlns:a16="http://schemas.microsoft.com/office/drawing/2014/main" id="{61E5CAFB-4786-3B31-2C4B-D335E0F90EDA}"/>
+              </a:ext>
+            </a:extLst>
+          </p:cNvPr>
+          <p:cNvSpPr>
+            <a:spLocks noGrp="1"/>
+          </p:cNvSpPr>
+          <p:nvPr>
+            <p:ph idx="1"/>
+          </p:nvPr>
+        </p:nvSpPr>
+        <p:spPr/>
+        <p:txBody>
+          <a:bodyPr/>
+          <a:lstStyle/>
+          <a:p>
+            <a:pPr marL="0" indent="0">
+              <a:buNone/>
+            </a:pPr>
+            <a:endParaRPr lang="en-US" dirty="0"/>
+          </a:p>
+          <a:p>
+            <a:pPr marL="0" indent="0">
+              <a:buNone/>
+            </a:pPr>
+            <a:r>
+              <a:rPr lang="en-US" dirty="0"/>
+              <a:t>Take the a-frame code in:</a:t>
+            </a:r>
+          </a:p>
+          <a:p>
+            <a:pPr marL="0" indent="0">
+              <a:buNone/>
+            </a:pPr>
+            <a:r>
+              <a:rPr lang="en-US" dirty="0"/>
+              <a:t>	</a:t>
+            </a:r>
+            <a:r>
+              <a:rPr lang="en-US" b="1" dirty="0"/>
+              <a:t>a-Platonic-solids.html</a:t>
+            </a:r>
+          </a:p>
+          <a:p>
+            <a:pPr marL="0" indent="0">
+              <a:buNone/>
+            </a:pPr>
+            <a:endParaRPr lang="en-US" dirty="0"/>
+          </a:p>
+          <a:p>
+            <a:pPr marL="0" indent="0">
+              <a:buNone/>
+            </a:pPr>
+            <a:r>
+              <a:rPr lang="en-US"/>
+              <a:t>Have AI </a:t>
+            </a:r>
+            <a:r>
+              <a:rPr lang="en-US" dirty="0"/>
+              <a:t>add components to log clicks on each Platonic solid in the browser console</a:t>
+            </a:r>
+          </a:p>
+          <a:p>
+            <a:pPr marL="0" indent="0">
+              <a:buNone/>
+            </a:pPr>
+            <a:endParaRPr lang="en-US" dirty="0"/>
+          </a:p>
+        </p:txBody>
+      </p:sp>
+    </p:spTree>
+    <p:extLst>
+      <p:ext uri="{BB962C8B-B14F-4D97-AF65-F5344CB8AC3E}">
+        <p14:creationId xmlns:p14="http://schemas.microsoft.com/office/powerpoint/2010/main" val="218688353"/>
+      </p:ext>
+    </p:extLst>
+  </p:cSld>
+  <p:clrMapOvr>
+    <a:masterClrMapping/>
+  </p:clrMapOvr>
+</p:sld>
+</file>
+
+<file path=ppt/slides/slide14.xml><?xml version="1.0" encoding="utf-8"?>
 <p:sld xmlns:a="http://schemas.openxmlformats.org/drawingml/2006/main" xmlns:r="http://schemas.openxmlformats.org/officeDocument/2006/relationships" xmlns:p="http://schemas.openxmlformats.org/presentationml/2006/main">
   <p:cSld>
     <p:spTree>
